--- a/Lesson24-Telemetry/Lesson24-Telemetry.pptx
+++ b/Lesson24-Telemetry/Lesson24-Telemetry.pptx
@@ -774,7 +774,7 @@
           <a:p>
             <a:r>
               <a:rPr lang="en-US" dirty="0"/>
-              <a:t>Step 1 configures OpenTelemetry, written as separate statements rather than a fluent chain to keep each part visible. Sdk.CreateTracerProviderBuilder starts the configuration. The highlighted call, AddSource with the wildcard Microsoft.SemanticKernel star, tells the tracer to listen to every diagnostic source Semantic Kernel emits under that namespace. AddConsoleExporter sends each finished span to the terminal, standing in for a real tracing backend. Build returns a TracerProvider, held in a using declaration so it is disposed when Main ends. All of this happens before the kernel is built, so no activity is missed. Step 2 then builds the kernel as usual and registers SlowWeatherPlugin.</a:t>
+              <a:t>Step 1 configures OpenTelemetry, written as separate statements rather than a fluent chain to keep each part visible. Sdk.CreateTracerProviderBuilder starts the configuration. The highlighted call, AddSource with the wildcard Microsoft.SemanticKernel star, tells the tracer to listen to every diagnostic source Semantic Kernel emits under that namespace. AddConsoleExporter sends each finished span to the terminal, standing in for a real tracing backend. Build returns a TracerProvider, held in a using declaration so it is disposed when Main ends. All of this happens before the kernel is built, so no activity is missed. One more line matters: AppContext.SetSwitch with Microsoft.SemanticKernel.Experimental.GenAI.EnableOTelDiagnostics set to true. Model-call spans are still experimental in Semantic Kernel, and without that switch you would only see the function spans, not the calls to gpt-4.1-mini. We leave the EnableOTelDiagnosticsSensitive variant off, because it would also write the prompt and completion text into the trace. Step 2 then builds the kernel as usual and registers SlowWeatherPlugin.</a:t>
             </a:r>
             <a:endParaRPr lang="en-US" dirty="0"/>
           </a:p>
@@ -1038,7 +1038,7 @@
           <a:p>
             <a:r>
               <a:rPr lang="en-US" dirty="0"/>
-              <a:t>Run the project with OPENAI_API_KEY set. Everything between EXECUTING and TRACING and Final AI Output on this slide is illustrative and heavily trimmed: the console exporter prints many fields per span, including span IDs, parent IDs, kind, start time, source name and tags, and the exact span names depend on your Semantic Kernel version. What to look for is the shape. Spans print as each activity finishes, so the inner tool span appears first, with a duration just over 800 milliseconds, followed by the enclosing prompt invocation, whose duration includes the model calls and the tool. Both share one TraceId. The final answer reflects the mock plugin's 72 degrees and sunny, and the session ends with the reminder to review the traces.</a:t>
+              <a:t>Run the project with OPENAI_API_KEY set. Everything between EXECUTING and TRACING and Final AI Output on this slide is illustrative and heavily trimmed: the console exporter prints many fields per span, including span IDs, parent IDs, kind, start time, source name and tags, and the exact span names depend on your Semantic Kernel version. What to look for is the shape. Spans print as each activity finishes. Because the GenAI diagnostics switch is on, the first model call appears as a chat span named for the model, then the tool span with a duration just over 800 milliseconds, then the second model call that writes the answer, and finally the enclosing prompt invocation, whose duration covers all three. They all share one TraceId. Remove the AppContext.SetSwitch line and run again: the two chat spans disappear. The final answer reflects the mock plugin's 72 degrees and sunny, and the session ends with the reminder to review the traces.</a:t>
             </a:r>
             <a:endParaRPr lang="en-US" dirty="0"/>
           </a:p>
@@ -4751,7 +4751,7 @@
                 <a:ea typeface="Calibri" pitchFamily="34" charset="-122"/>
                 <a:cs typeface="Calibri" pitchFamily="34" charset="-120"/>
               </a:rPr>
-              <a:t>The tracer is built before the kernel, so it sees every activity.</a:t>
+              <a:t>One AppContext switch then turns on SK's model-call spans.</a:t>
             </a:r>
             <a:endParaRPr lang="en-US" sz="1400" dirty="0"/>
           </a:p>
@@ -6717,11 +6717,11 @@
         <p:spPr>
           <a:xfrm>
             <a:off x="457200" y="1325880"/>
-            <a:ext cx="5257800" cy="2148840"/>
+            <a:ext cx="5257800" cy="2514600"/>
           </a:xfrm>
           <a:prstGeom prst="roundRect">
             <a:avLst>
-              <a:gd name="adj" fmla="val 3404"/>
+              <a:gd name="adj" fmla="val 2909"/>
             </a:avLst>
           </a:prstGeom>
           <a:solidFill>
@@ -6744,7 +6744,7 @@
         <p:spPr>
           <a:xfrm>
             <a:off x="640080" y="1463040"/>
-            <a:ext cx="4892040" cy="1874520"/>
+            <a:ext cx="4892040" cy="2240280"/>
           </a:xfrm>
           <a:prstGeom prst="rect">
             <a:avLst/>
@@ -6760,15 +6760,15 @@
               <a:buNone/>
             </a:pPr>
             <a:r>
-              <a:rPr lang="en-US" sz="1050" dirty="0">
-                <a:solidFill>
-                  <a:srgbClr val="D7E3F4"/>
+              <a:rPr lang="en-US" sz="1050" b="1" dirty="0">
+                <a:solidFill>
+                  <a:srgbClr val="F5A623"/>
                 </a:solidFill>
                 <a:latin typeface="Courier New" pitchFamily="34" charset="0"/>
                 <a:ea typeface="Courier New" pitchFamily="34" charset="-122"/>
                 <a:cs typeface="Courier New" pitchFamily="34" charset="-120"/>
               </a:rPr>
-              <a:t>Starting observability session...</a:t>
+              <a:t>User: What is the weather like in Seattle right now?</a:t>
             </a:r>
             <a:endParaRPr lang="en-US" sz="1050" dirty="0"/>
           </a:p>
@@ -6777,15 +6777,15 @@
               <a:buNone/>
             </a:pPr>
             <a:r>
-              <a:rPr lang="en-US" sz="1050" b="1" dirty="0">
-                <a:solidFill>
-                  <a:srgbClr val="F5A623"/>
+              <a:rPr lang="en-US" sz="1050" dirty="0">
+                <a:solidFill>
+                  <a:srgbClr val="D7E3F4"/>
                 </a:solidFill>
                 <a:latin typeface="Courier New" pitchFamily="34" charset="0"/>
                 <a:ea typeface="Courier New" pitchFamily="34" charset="-122"/>
                 <a:cs typeface="Courier New" pitchFamily="34" charset="-120"/>
               </a:rPr>
-              <a:t>User: What is the weather like in Seattle right now?</a:t>
+              <a:t>--- EXECUTING &amp; TRACING ---</a:t>
             </a:r>
             <a:endParaRPr lang="en-US" sz="1050" dirty="0"/>
           </a:p>
@@ -6802,7 +6802,7 @@
                 <a:ea typeface="Courier New" pitchFamily="34" charset="-122"/>
                 <a:cs typeface="Courier New" pitchFamily="34" charset="-120"/>
               </a:rPr>
-              <a:t>--- EXECUTING &amp; TRACING ---</a:t>
+              <a:t>Activity.DisplayName:   chat gpt-4.1-mini</a:t>
             </a:r>
             <a:endParaRPr lang="en-US" sz="1050" dirty="0"/>
           </a:p>
@@ -6819,7 +6819,7 @@
                 <a:ea typeface="Courier New" pitchFamily="34" charset="-122"/>
                 <a:cs typeface="Courier New" pitchFamily="34" charset="-120"/>
               </a:rPr>
-              <a:t>Activity.TraceId:       4bf92f3577b34da6a3ce929d0e0e4736</a:t>
+              <a:t>Activity.Duration:      00:00:00.9137702</a:t>
             </a:r>
             <a:endParaRPr lang="en-US" sz="1050" dirty="0"/>
           </a:p>
@@ -6870,7 +6870,24 @@
                 <a:ea typeface="Courier New" pitchFamily="34" charset="-122"/>
                 <a:cs typeface="Courier New" pitchFamily="34" charset="-120"/>
               </a:rPr>
-              <a:t>Activity.TraceId:       4bf92f3577b34da6a3ce929d0e0e4736</a:t>
+              <a:t>Activity.DisplayName:   chat gpt-4.1-mini</a:t>
+            </a:r>
+            <a:endParaRPr lang="en-US" sz="1050" dirty="0"/>
+          </a:p>
+          <a:p>
+            <a:pPr indent="0" marL="0">
+              <a:buNone/>
+            </a:pPr>
+            <a:r>
+              <a:rPr lang="en-US" sz="1050" dirty="0">
+                <a:solidFill>
+                  <a:srgbClr val="D7E3F4"/>
+                </a:solidFill>
+                <a:latin typeface="Courier New" pitchFamily="34" charset="0"/>
+                <a:ea typeface="Courier New" pitchFamily="34" charset="-122"/>
+                <a:cs typeface="Courier New" pitchFamily="34" charset="-120"/>
+              </a:rPr>
+              <a:t>Activity.Duration:      00:00:00.8711934</a:t>
             </a:r>
             <a:endParaRPr lang="en-US" sz="1050" dirty="0"/>
           </a:p>
@@ -7192,7 +7209,7 @@
                 <a:ea typeface="Calibri" pitchFamily="34" charset="-122"/>
                 <a:cs typeface="Calibri" pitchFamily="34" charset="-120"/>
               </a:rPr>
-              <a:t>Real spans print many more fields.</a:t>
+              <a:t>Real spans print TraceId and many more fields.</a:t>
             </a:r>
             <a:endParaRPr lang="en-US" sz="1200" dirty="0"/>
           </a:p>
